--- a/ClassMaterials/JavaIntro/Slides/Part3-IntroGenAI.pptx
+++ b/ClassMaterials/JavaIntro/Slides/Part3-IntroGenAI.pptx
@@ -118,6 +118,11 @@
       </a:defRPr>
     </a:lvl9pPr>
   </p:defaultTextStyle>
+  <p:extLst>
+    <p:ext uri="{EFAFB233-063F-42B5-8137-9DF3F51BA10A}">
+      <p15:sldGuideLst xmlns:p15="http://schemas.microsoft.com/office/powerpoint/2012/main"/>
+    </p:ext>
+  </p:extLst>
 </p:presentation>
 </file>
 
@@ -203,7 +208,7 @@
           <a:p>
             <a:fld id="{1D0CD9E7-4D7B-46B1-BA25-97D00ACF8C0E}" type="datetimeFigureOut">
               <a:rPr lang="en-US" smtClean="0"/>
-              <a:t>8/26/2026</a:t>
+              <a:t>9/1/2026</a:t>
             </a:fld>
             <a:endParaRPr lang="en-US"/>
           </a:p>
@@ -1042,7 +1047,7 @@
           <a:p>
             <a:fld id="{F780F4D6-6702-4D87-B94D-8397A2559F4B}" type="datetimeFigureOut">
               <a:rPr lang="en-US" smtClean="0"/>
-              <a:t>8/26/2026</a:t>
+              <a:t>9/1/2026</a:t>
             </a:fld>
             <a:endParaRPr lang="en-US"/>
           </a:p>
@@ -1240,7 +1245,7 @@
           <a:p>
             <a:fld id="{F780F4D6-6702-4D87-B94D-8397A2559F4B}" type="datetimeFigureOut">
               <a:rPr lang="en-US" smtClean="0"/>
-              <a:t>8/26/2026</a:t>
+              <a:t>9/1/2026</a:t>
             </a:fld>
             <a:endParaRPr lang="en-US"/>
           </a:p>
@@ -1448,7 +1453,7 @@
           <a:p>
             <a:fld id="{F780F4D6-6702-4D87-B94D-8397A2559F4B}" type="datetimeFigureOut">
               <a:rPr lang="en-US" smtClean="0"/>
-              <a:t>8/26/2026</a:t>
+              <a:t>9/1/2026</a:t>
             </a:fld>
             <a:endParaRPr lang="en-US"/>
           </a:p>
@@ -1646,7 +1651,7 @@
           <a:p>
             <a:fld id="{F780F4D6-6702-4D87-B94D-8397A2559F4B}" type="datetimeFigureOut">
               <a:rPr lang="en-US" smtClean="0"/>
-              <a:t>8/26/2026</a:t>
+              <a:t>9/1/2026</a:t>
             </a:fld>
             <a:endParaRPr lang="en-US"/>
           </a:p>
@@ -1921,7 +1926,7 @@
           <a:p>
             <a:fld id="{F780F4D6-6702-4D87-B94D-8397A2559F4B}" type="datetimeFigureOut">
               <a:rPr lang="en-US" smtClean="0"/>
-              <a:t>8/26/2026</a:t>
+              <a:t>9/1/2026</a:t>
             </a:fld>
             <a:endParaRPr lang="en-US"/>
           </a:p>
@@ -2186,7 +2191,7 @@
           <a:p>
             <a:fld id="{F780F4D6-6702-4D87-B94D-8397A2559F4B}" type="datetimeFigureOut">
               <a:rPr lang="en-US" smtClean="0"/>
-              <a:t>8/26/2026</a:t>
+              <a:t>9/1/2026</a:t>
             </a:fld>
             <a:endParaRPr lang="en-US"/>
           </a:p>
@@ -2598,7 +2603,7 @@
           <a:p>
             <a:fld id="{F780F4D6-6702-4D87-B94D-8397A2559F4B}" type="datetimeFigureOut">
               <a:rPr lang="en-US" smtClean="0"/>
-              <a:t>8/26/2026</a:t>
+              <a:t>9/1/2026</a:t>
             </a:fld>
             <a:endParaRPr lang="en-US"/>
           </a:p>
@@ -2739,7 +2744,7 @@
           <a:p>
             <a:fld id="{F780F4D6-6702-4D87-B94D-8397A2559F4B}" type="datetimeFigureOut">
               <a:rPr lang="en-US" smtClean="0"/>
-              <a:t>8/26/2026</a:t>
+              <a:t>9/1/2026</a:t>
             </a:fld>
             <a:endParaRPr lang="en-US"/>
           </a:p>
@@ -2852,7 +2857,7 @@
           <a:p>
             <a:fld id="{F780F4D6-6702-4D87-B94D-8397A2559F4B}" type="datetimeFigureOut">
               <a:rPr lang="en-US" smtClean="0"/>
-              <a:t>8/26/2026</a:t>
+              <a:t>9/1/2026</a:t>
             </a:fld>
             <a:endParaRPr lang="en-US"/>
           </a:p>
@@ -3163,7 +3168,7 @@
           <a:p>
             <a:fld id="{F780F4D6-6702-4D87-B94D-8397A2559F4B}" type="datetimeFigureOut">
               <a:rPr lang="en-US" smtClean="0"/>
-              <a:t>8/26/2026</a:t>
+              <a:t>9/1/2026</a:t>
             </a:fld>
             <a:endParaRPr lang="en-US"/>
           </a:p>
@@ -3451,7 +3456,7 @@
           <a:p>
             <a:fld id="{F780F4D6-6702-4D87-B94D-8397A2559F4B}" type="datetimeFigureOut">
               <a:rPr lang="en-US" smtClean="0"/>
-              <a:t>8/26/2026</a:t>
+              <a:t>9/1/2026</a:t>
             </a:fld>
             <a:endParaRPr lang="en-US"/>
           </a:p>
@@ -3692,7 +3697,7 @@
           <a:p>
             <a:fld id="{F780F4D6-6702-4D87-B94D-8397A2559F4B}" type="datetimeFigureOut">
               <a:rPr lang="en-US" smtClean="0"/>
-              <a:t>8/26/2026</a:t>
+              <a:t>9/1/2026</a:t>
             </a:fld>
             <a:endParaRPr lang="en-US"/>
           </a:p>
@@ -8308,8 +8313,8 @@
         </p:nvSpPr>
         <p:spPr>
           <a:xfrm>
-            <a:off x="2209800" y="1371600"/>
-            <a:ext cx="8069580" cy="4724877"/>
+            <a:off x="2209799" y="1371600"/>
+            <a:ext cx="8602579" cy="4724877"/>
           </a:xfrm>
         </p:spPr>
         <p:txBody>
